--- a/SFN/Images/Task Images/trust_task_construct.pptx
+++ b/SFN/Images/Task Images/trust_task_construct.pptx
@@ -104,6 +104,11 @@
       </a:defRPr>
     </a:lvl9pPr>
   </p:defaultTextStyle>
+  <p:extLst>
+    <p:ext uri="{EFAFB233-063F-42B5-8137-9DF3F51BA10A}">
+      <p15:sldGuideLst xmlns:p15="http://schemas.microsoft.com/office/powerpoint/2012/main"/>
+    </p:ext>
+  </p:extLst>
 </p:presentation>
 </file>
 
@@ -254,7 +259,7 @@
           <a:p>
             <a:fld id="{2146AE3B-695F-1F46-81C0-299BB4D09AA0}" type="datetimeFigureOut">
               <a:rPr lang="en-US" smtClean="0"/>
-              <a:t>10/26/23</a:t>
+              <a:t>11/8/23</a:t>
             </a:fld>
             <a:endParaRPr lang="en-US"/>
           </a:p>
@@ -452,7 +457,7 @@
           <a:p>
             <a:fld id="{2146AE3B-695F-1F46-81C0-299BB4D09AA0}" type="datetimeFigureOut">
               <a:rPr lang="en-US" smtClean="0"/>
-              <a:t>10/26/23</a:t>
+              <a:t>11/8/23</a:t>
             </a:fld>
             <a:endParaRPr lang="en-US"/>
           </a:p>
@@ -660,7 +665,7 @@
           <a:p>
             <a:fld id="{2146AE3B-695F-1F46-81C0-299BB4D09AA0}" type="datetimeFigureOut">
               <a:rPr lang="en-US" smtClean="0"/>
-              <a:t>10/26/23</a:t>
+              <a:t>11/8/23</a:t>
             </a:fld>
             <a:endParaRPr lang="en-US"/>
           </a:p>
@@ -858,7 +863,7 @@
           <a:p>
             <a:fld id="{2146AE3B-695F-1F46-81C0-299BB4D09AA0}" type="datetimeFigureOut">
               <a:rPr lang="en-US" smtClean="0"/>
-              <a:t>10/26/23</a:t>
+              <a:t>11/8/23</a:t>
             </a:fld>
             <a:endParaRPr lang="en-US"/>
           </a:p>
@@ -1133,7 +1138,7 @@
           <a:p>
             <a:fld id="{2146AE3B-695F-1F46-81C0-299BB4D09AA0}" type="datetimeFigureOut">
               <a:rPr lang="en-US" smtClean="0"/>
-              <a:t>10/26/23</a:t>
+              <a:t>11/8/23</a:t>
             </a:fld>
             <a:endParaRPr lang="en-US"/>
           </a:p>
@@ -1398,7 +1403,7 @@
           <a:p>
             <a:fld id="{2146AE3B-695F-1F46-81C0-299BB4D09AA0}" type="datetimeFigureOut">
               <a:rPr lang="en-US" smtClean="0"/>
-              <a:t>10/26/23</a:t>
+              <a:t>11/8/23</a:t>
             </a:fld>
             <a:endParaRPr lang="en-US"/>
           </a:p>
@@ -1810,7 +1815,7 @@
           <a:p>
             <a:fld id="{2146AE3B-695F-1F46-81C0-299BB4D09AA0}" type="datetimeFigureOut">
               <a:rPr lang="en-US" smtClean="0"/>
-              <a:t>10/26/23</a:t>
+              <a:t>11/8/23</a:t>
             </a:fld>
             <a:endParaRPr lang="en-US"/>
           </a:p>
@@ -1951,7 +1956,7 @@
           <a:p>
             <a:fld id="{2146AE3B-695F-1F46-81C0-299BB4D09AA0}" type="datetimeFigureOut">
               <a:rPr lang="en-US" smtClean="0"/>
-              <a:t>10/26/23</a:t>
+              <a:t>11/8/23</a:t>
             </a:fld>
             <a:endParaRPr lang="en-US"/>
           </a:p>
@@ -2064,7 +2069,7 @@
           <a:p>
             <a:fld id="{2146AE3B-695F-1F46-81C0-299BB4D09AA0}" type="datetimeFigureOut">
               <a:rPr lang="en-US" smtClean="0"/>
-              <a:t>10/26/23</a:t>
+              <a:t>11/8/23</a:t>
             </a:fld>
             <a:endParaRPr lang="en-US"/>
           </a:p>
@@ -2375,7 +2380,7 @@
           <a:p>
             <a:fld id="{2146AE3B-695F-1F46-81C0-299BB4D09AA0}" type="datetimeFigureOut">
               <a:rPr lang="en-US" smtClean="0"/>
-              <a:t>10/26/23</a:t>
+              <a:t>11/8/23</a:t>
             </a:fld>
             <a:endParaRPr lang="en-US"/>
           </a:p>
@@ -2663,7 +2668,7 @@
           <a:p>
             <a:fld id="{2146AE3B-695F-1F46-81C0-299BB4D09AA0}" type="datetimeFigureOut">
               <a:rPr lang="en-US" smtClean="0"/>
-              <a:t>10/26/23</a:t>
+              <a:t>11/8/23</a:t>
             </a:fld>
             <a:endParaRPr lang="en-US"/>
           </a:p>
@@ -2904,7 +2909,7 @@
           <a:p>
             <a:fld id="{2146AE3B-695F-1F46-81C0-299BB4D09AA0}" type="datetimeFigureOut">
               <a:rPr lang="en-US" smtClean="0"/>
-              <a:t>10/26/23</a:t>
+              <a:t>11/8/23</a:t>
             </a:fld>
             <a:endParaRPr lang="en-US"/>
           </a:p>
@@ -3468,7 +3473,7 @@
         </p:blipFill>
         <p:spPr>
           <a:xfrm>
-            <a:off x="2852378" y="2771780"/>
+            <a:off x="3357531" y="2817413"/>
             <a:ext cx="2848448" cy="1890080"/>
           </a:xfrm>
           <a:prstGeom prst="rect">
@@ -3528,7 +3533,7 @@
         </p:blipFill>
         <p:spPr>
           <a:xfrm>
-            <a:off x="1362041" y="1485177"/>
+            <a:off x="2318482" y="1485177"/>
             <a:ext cx="2848448" cy="1943823"/>
           </a:xfrm>
           <a:prstGeom prst="rect">
@@ -3587,7 +3592,7 @@
         </p:blipFill>
         <p:spPr>
           <a:xfrm>
-            <a:off x="193203" y="197288"/>
+            <a:off x="1279433" y="206684"/>
             <a:ext cx="2848448" cy="1919430"/>
           </a:xfrm>
           <a:prstGeom prst="rect">
@@ -3625,186 +3630,207 @@
           </a:sp3d>
         </p:spPr>
       </p:pic>
-      <p:pic>
-        <p:nvPicPr>
-          <p:cNvPr id="15" name="Picture 14">
-            <a:extLst>
-              <a:ext uri="{FF2B5EF4-FFF2-40B4-BE49-F238E27FC236}">
-                <a16:creationId xmlns:a16="http://schemas.microsoft.com/office/drawing/2014/main" id="{74E44D73-B6A8-8678-CF30-A255CB44EBC9}"/>
-              </a:ext>
-            </a:extLst>
-          </p:cNvPr>
-          <p:cNvPicPr>
-            <a:picLocks noChangeAspect="1"/>
-          </p:cNvPicPr>
+      <p:grpSp>
+        <p:nvGrpSpPr>
+          <p:cNvPr id="2" name="Group 1">
+            <a:extLst>
+              <a:ext uri="{FF2B5EF4-FFF2-40B4-BE49-F238E27FC236}">
+                <a16:creationId xmlns:a16="http://schemas.microsoft.com/office/drawing/2014/main" id="{F5BC6CFE-D920-5211-7FA1-6BEECEC4CBB5}"/>
+              </a:ext>
+            </a:extLst>
+          </p:cNvPr>
+          <p:cNvGrpSpPr/>
           <p:nvPr/>
-        </p:nvPicPr>
-        <p:blipFill>
-          <a:blip r:embed="rId7"/>
-          <a:stretch>
-            <a:fillRect/>
-          </a:stretch>
-        </p:blipFill>
-        <p:spPr>
+        </p:nvGrpSpPr>
+        <p:grpSpPr>
           <a:xfrm>
-            <a:off x="3514264" y="206684"/>
-            <a:ext cx="1027916" cy="990673"/>
+            <a:off x="4463098" y="206684"/>
+            <a:ext cx="3360226" cy="995434"/>
+            <a:chOff x="3514264" y="206684"/>
+            <a:chExt cx="3360226" cy="995434"/>
           </a:xfrm>
-          <a:prstGeom prst="rect">
-            <a:avLst/>
-          </a:prstGeom>
-          <a:solidFill>
-            <a:srgbClr val="FFFFFF">
-              <a:shade val="85000"/>
-            </a:srgbClr>
-          </a:solidFill>
-          <a:ln w="88900" cap="sq">
+        </p:grpSpPr>
+        <p:pic>
+          <p:nvPicPr>
+            <p:cNvPr id="15" name="Picture 14">
+              <a:extLst>
+                <a:ext uri="{FF2B5EF4-FFF2-40B4-BE49-F238E27FC236}">
+                  <a16:creationId xmlns:a16="http://schemas.microsoft.com/office/drawing/2014/main" id="{74E44D73-B6A8-8678-CF30-A255CB44EBC9}"/>
+                </a:ext>
+              </a:extLst>
+            </p:cNvPr>
+            <p:cNvPicPr>
+              <a:picLocks noChangeAspect="1"/>
+            </p:cNvPicPr>
+            <p:nvPr/>
+          </p:nvPicPr>
+          <p:blipFill>
+            <a:blip r:embed="rId7"/>
+            <a:stretch>
+              <a:fillRect/>
+            </a:stretch>
+          </p:blipFill>
+          <p:spPr>
+            <a:xfrm>
+              <a:off x="3514264" y="206684"/>
+              <a:ext cx="1027916" cy="990673"/>
+            </a:xfrm>
+            <a:prstGeom prst="rect">
+              <a:avLst/>
+            </a:prstGeom>
             <a:solidFill>
-              <a:srgbClr val="C00000"/>
+              <a:srgbClr val="FFFFFF">
+                <a:shade val="85000"/>
+              </a:srgbClr>
             </a:solidFill>
-            <a:miter lim="800000"/>
-          </a:ln>
-          <a:effectLst>
-            <a:outerShdw blurRad="55000" dist="18000" dir="5400000" algn="tl" rotWithShape="0">
-              <a:srgbClr val="000000">
-                <a:alpha val="40000"/>
+            <a:ln w="88900" cap="sq">
+              <a:solidFill>
+                <a:srgbClr val="C00000"/>
+              </a:solidFill>
+              <a:miter lim="800000"/>
+            </a:ln>
+            <a:effectLst>
+              <a:outerShdw blurRad="55000" dist="18000" dir="5400000" algn="tl" rotWithShape="0">
+                <a:srgbClr val="000000">
+                  <a:alpha val="40000"/>
+                </a:srgbClr>
+              </a:outerShdw>
+            </a:effectLst>
+            <a:scene3d>
+              <a:camera prst="orthographicFront"/>
+              <a:lightRig rig="twoPt" dir="t">
+                <a:rot lat="0" lon="0" rev="7200000"/>
+              </a:lightRig>
+            </a:scene3d>
+            <a:sp3d>
+              <a:bevelT w="25400" h="19050"/>
+              <a:contourClr>
+                <a:srgbClr val="FFFFFF"/>
+              </a:contourClr>
+            </a:sp3d>
+          </p:spPr>
+        </p:pic>
+        <p:pic>
+          <p:nvPicPr>
+            <p:cNvPr id="49" name="Picture 48" descr="A grey square with a person's head&#10;&#10;Description automatically generated">
+              <a:extLst>
+                <a:ext uri="{FF2B5EF4-FFF2-40B4-BE49-F238E27FC236}">
+                  <a16:creationId xmlns:a16="http://schemas.microsoft.com/office/drawing/2014/main" id="{0284D48B-ABAB-E483-5B47-5F312FEC99CF}"/>
+                </a:ext>
+              </a:extLst>
+            </p:cNvPr>
+            <p:cNvPicPr>
+              <a:picLocks noChangeAspect="1"/>
+            </p:cNvPicPr>
+            <p:nvPr/>
+          </p:nvPicPr>
+          <p:blipFill>
+            <a:blip r:embed="rId8"/>
+            <a:stretch>
+              <a:fillRect/>
+            </a:stretch>
+          </p:blipFill>
+          <p:spPr>
+            <a:xfrm>
+              <a:off x="4717835" y="206684"/>
+              <a:ext cx="982991" cy="995434"/>
+            </a:xfrm>
+            <a:prstGeom prst="rect">
+              <a:avLst/>
+            </a:prstGeom>
+            <a:solidFill>
+              <a:srgbClr val="FFFFFF">
+                <a:shade val="85000"/>
               </a:srgbClr>
-            </a:outerShdw>
-          </a:effectLst>
-          <a:scene3d>
-            <a:camera prst="orthographicFront"/>
-            <a:lightRig rig="twoPt" dir="t">
-              <a:rot lat="0" lon="0" rev="7200000"/>
-            </a:lightRig>
-          </a:scene3d>
-          <a:sp3d>
-            <a:bevelT w="25400" h="19050"/>
-            <a:contourClr>
-              <a:srgbClr val="FFFFFF"/>
-            </a:contourClr>
-          </a:sp3d>
-        </p:spPr>
-      </p:pic>
-      <p:pic>
-        <p:nvPicPr>
-          <p:cNvPr id="49" name="Picture 48" descr="A grey square with a person's head&#10;&#10;Description automatically generated">
-            <a:extLst>
-              <a:ext uri="{FF2B5EF4-FFF2-40B4-BE49-F238E27FC236}">
-                <a16:creationId xmlns:a16="http://schemas.microsoft.com/office/drawing/2014/main" id="{0284D48B-ABAB-E483-5B47-5F312FEC99CF}"/>
-              </a:ext>
-            </a:extLst>
-          </p:cNvPr>
-          <p:cNvPicPr>
-            <a:picLocks noChangeAspect="1"/>
-          </p:cNvPicPr>
-          <p:nvPr/>
-        </p:nvPicPr>
-        <p:blipFill>
-          <a:blip r:embed="rId8"/>
-          <a:stretch>
-            <a:fillRect/>
-          </a:stretch>
-        </p:blipFill>
-        <p:spPr>
-          <a:xfrm>
-            <a:off x="4717835" y="206684"/>
-            <a:ext cx="982991" cy="995434"/>
-          </a:xfrm>
-          <a:prstGeom prst="rect">
-            <a:avLst/>
-          </a:prstGeom>
-          <a:solidFill>
-            <a:srgbClr val="FFFFFF">
-              <a:shade val="85000"/>
-            </a:srgbClr>
-          </a:solidFill>
-          <a:ln w="88900" cap="sq">
+            </a:solidFill>
+            <a:ln w="88900" cap="sq">
+              <a:solidFill>
+                <a:srgbClr val="C00000"/>
+              </a:solidFill>
+              <a:miter lim="800000"/>
+            </a:ln>
+            <a:effectLst>
+              <a:outerShdw blurRad="55000" dist="18000" dir="5400000" algn="tl" rotWithShape="0">
+                <a:srgbClr val="000000">
+                  <a:alpha val="40000"/>
+                </a:srgbClr>
+              </a:outerShdw>
+            </a:effectLst>
+            <a:scene3d>
+              <a:camera prst="orthographicFront"/>
+              <a:lightRig rig="twoPt" dir="t">
+                <a:rot lat="0" lon="0" rev="7200000"/>
+              </a:lightRig>
+            </a:scene3d>
+            <a:sp3d>
+              <a:bevelT w="25400" h="19050"/>
+              <a:contourClr>
+                <a:srgbClr val="FFFFFF"/>
+              </a:contourClr>
+            </a:sp3d>
+          </p:spPr>
+        </p:pic>
+        <p:pic>
+          <p:nvPicPr>
+            <p:cNvPr id="52" name="Picture 51" descr="A person with a smile on his face&#10;&#10;Description automatically generated">
+              <a:extLst>
+                <a:ext uri="{FF2B5EF4-FFF2-40B4-BE49-F238E27FC236}">
+                  <a16:creationId xmlns:a16="http://schemas.microsoft.com/office/drawing/2014/main" id="{BDD6B4C0-B9C9-D409-4C71-06AFF4C47C1F}"/>
+                </a:ext>
+              </a:extLst>
+            </p:cNvPr>
+            <p:cNvPicPr>
+              <a:picLocks noChangeAspect="1"/>
+            </p:cNvPicPr>
+            <p:nvPr/>
+          </p:nvPicPr>
+          <p:blipFill>
+            <a:blip r:embed="rId9"/>
+            <a:stretch>
+              <a:fillRect/>
+            </a:stretch>
+          </p:blipFill>
+          <p:spPr>
+            <a:xfrm>
+              <a:off x="5883817" y="206684"/>
+              <a:ext cx="990673" cy="990673"/>
+            </a:xfrm>
+            <a:prstGeom prst="rect">
+              <a:avLst/>
+            </a:prstGeom>
             <a:solidFill>
-              <a:srgbClr val="C00000"/>
+              <a:srgbClr val="FFFFFF">
+                <a:shade val="85000"/>
+              </a:srgbClr>
             </a:solidFill>
-            <a:miter lim="800000"/>
-          </a:ln>
-          <a:effectLst>
-            <a:outerShdw blurRad="55000" dist="18000" dir="5400000" algn="tl" rotWithShape="0">
-              <a:srgbClr val="000000">
-                <a:alpha val="40000"/>
-              </a:srgbClr>
-            </a:outerShdw>
-          </a:effectLst>
-          <a:scene3d>
-            <a:camera prst="orthographicFront"/>
-            <a:lightRig rig="twoPt" dir="t">
-              <a:rot lat="0" lon="0" rev="7200000"/>
-            </a:lightRig>
-          </a:scene3d>
-          <a:sp3d>
-            <a:bevelT w="25400" h="19050"/>
-            <a:contourClr>
-              <a:srgbClr val="FFFFFF"/>
-            </a:contourClr>
-          </a:sp3d>
-        </p:spPr>
-      </p:pic>
-      <p:pic>
-        <p:nvPicPr>
-          <p:cNvPr id="52" name="Picture 51" descr="A person with a smile on his face&#10;&#10;Description automatically generated">
-            <a:extLst>
-              <a:ext uri="{FF2B5EF4-FFF2-40B4-BE49-F238E27FC236}">
-                <a16:creationId xmlns:a16="http://schemas.microsoft.com/office/drawing/2014/main" id="{BDD6B4C0-B9C9-D409-4C71-06AFF4C47C1F}"/>
-              </a:ext>
-            </a:extLst>
-          </p:cNvPr>
-          <p:cNvPicPr>
-            <a:picLocks noChangeAspect="1"/>
-          </p:cNvPicPr>
-          <p:nvPr/>
-        </p:nvPicPr>
-        <p:blipFill>
-          <a:blip r:embed="rId9"/>
-          <a:stretch>
-            <a:fillRect/>
-          </a:stretch>
-        </p:blipFill>
-        <p:spPr>
-          <a:xfrm>
-            <a:off x="5883817" y="206684"/>
-            <a:ext cx="990673" cy="990673"/>
-          </a:xfrm>
-          <a:prstGeom prst="rect">
-            <a:avLst/>
-          </a:prstGeom>
-          <a:solidFill>
-            <a:srgbClr val="FFFFFF">
-              <a:shade val="85000"/>
-            </a:srgbClr>
-          </a:solidFill>
-          <a:ln w="88900" cap="sq">
-            <a:solidFill>
-              <a:srgbClr val="C00000"/>
-            </a:solidFill>
-            <a:miter lim="800000"/>
-          </a:ln>
-          <a:effectLst>
-            <a:outerShdw blurRad="55000" dist="18000" dir="5400000" algn="tl" rotWithShape="0">
-              <a:srgbClr val="000000">
-                <a:alpha val="40000"/>
-              </a:srgbClr>
-            </a:outerShdw>
-          </a:effectLst>
-          <a:scene3d>
-            <a:camera prst="orthographicFront"/>
-            <a:lightRig rig="twoPt" dir="t">
-              <a:rot lat="0" lon="0" rev="7200000"/>
-            </a:lightRig>
-          </a:scene3d>
-          <a:sp3d>
-            <a:bevelT w="25400" h="19050"/>
-            <a:contourClr>
-              <a:srgbClr val="FFFFFF"/>
-            </a:contourClr>
-          </a:sp3d>
-        </p:spPr>
-      </p:pic>
+            <a:ln w="88900" cap="sq">
+              <a:solidFill>
+                <a:srgbClr val="C00000"/>
+              </a:solidFill>
+              <a:miter lim="800000"/>
+            </a:ln>
+            <a:effectLst>
+              <a:outerShdw blurRad="55000" dist="18000" dir="5400000" algn="tl" rotWithShape="0">
+                <a:srgbClr val="000000">
+                  <a:alpha val="40000"/>
+                </a:srgbClr>
+              </a:outerShdw>
+            </a:effectLst>
+            <a:scene3d>
+              <a:camera prst="orthographicFront"/>
+              <a:lightRig rig="twoPt" dir="t">
+                <a:rot lat="0" lon="0" rev="7200000"/>
+              </a:lightRig>
+            </a:scene3d>
+            <a:sp3d>
+              <a:bevelT w="25400" h="19050"/>
+              <a:contourClr>
+                <a:srgbClr val="FFFFFF"/>
+              </a:contourClr>
+            </a:sp3d>
+          </p:spPr>
+        </p:pic>
+      </p:grpSp>
     </p:spTree>
     <p:extLst>
       <p:ext uri="{BB962C8B-B14F-4D97-AF65-F5344CB8AC3E}">
